--- a/Entrega Final Geoespaciales.pptx
+++ b/Entrega Final Geoespaciales.pptx
@@ -3938,7 +3938,7 @@
           <a:p>
             <a:fld id="{4AAD347D-5ACD-4C99-B74B-A9C85AD731AF}" type="datetimeFigureOut">
               <a:rPr lang="en-US" smtClean="0"/>
-              <a:t>6/30/2025</a:t>
+              <a:t>7/8/2025</a:t>
             </a:fld>
             <a:endParaRPr lang="en-US"/>
           </a:p>
@@ -4235,7 +4235,7 @@
           <a:p>
             <a:fld id="{4AAD347D-5ACD-4C99-B74B-A9C85AD731AF}" type="datetimeFigureOut">
               <a:rPr lang="en-US" smtClean="0"/>
-              <a:t>6/30/2025</a:t>
+              <a:t>7/8/2025</a:t>
             </a:fld>
             <a:endParaRPr lang="en-US"/>
           </a:p>
@@ -4427,7 +4427,7 @@
           <a:p>
             <a:fld id="{4AAD347D-5ACD-4C99-B74B-A9C85AD731AF}" type="datetimeFigureOut">
               <a:rPr lang="en-US" smtClean="0"/>
-              <a:t>6/30/2025</a:t>
+              <a:t>7/8/2025</a:t>
             </a:fld>
             <a:endParaRPr lang="en-US"/>
           </a:p>
@@ -4688,7 +4688,7 @@
           <a:p>
             <a:fld id="{4AAD347D-5ACD-4C99-B74B-A9C85AD731AF}" type="datetimeFigureOut">
               <a:rPr lang="en-US" smtClean="0"/>
-              <a:t>6/30/2025</a:t>
+              <a:t>7/8/2025</a:t>
             </a:fld>
             <a:endParaRPr lang="en-US"/>
           </a:p>
@@ -5112,7 +5112,7 @@
           <a:p>
             <a:fld id="{4AAD347D-5ACD-4C99-B74B-A9C85AD731AF}" type="datetimeFigureOut">
               <a:rPr lang="en-US" smtClean="0"/>
-              <a:t>6/30/2025</a:t>
+              <a:t>7/8/2025</a:t>
             </a:fld>
             <a:endParaRPr lang="en-US"/>
           </a:p>
@@ -5649,7 +5649,7 @@
           <a:p>
             <a:fld id="{4AAD347D-5ACD-4C99-B74B-A9C85AD731AF}" type="datetimeFigureOut">
               <a:rPr lang="en-US" smtClean="0"/>
-              <a:t>6/30/2025</a:t>
+              <a:t>7/8/2025</a:t>
             </a:fld>
             <a:endParaRPr lang="en-US"/>
           </a:p>
@@ -6510,7 +6510,7 @@
           <a:p>
             <a:fld id="{4AAD347D-5ACD-4C99-B74B-A9C85AD731AF}" type="datetimeFigureOut">
               <a:rPr lang="en-US" smtClean="0"/>
-              <a:t>6/30/2025</a:t>
+              <a:t>7/8/2025</a:t>
             </a:fld>
             <a:endParaRPr lang="en-US"/>
           </a:p>
@@ -6679,7 +6679,7 @@
           <a:p>
             <a:fld id="{4509A250-FF31-4206-8172-F9D3106AACB1}" type="datetimeFigureOut">
               <a:rPr lang="en-US" smtClean="0"/>
-              <a:t>6/30/2025</a:t>
+              <a:t>7/8/2025</a:t>
             </a:fld>
             <a:endParaRPr lang="en-US"/>
           </a:p>
@@ -6862,7 +6862,7 @@
           <a:p>
             <a:fld id="{4509A250-FF31-4206-8172-F9D3106AACB1}" type="datetimeFigureOut">
               <a:rPr lang="en-US" smtClean="0"/>
-              <a:t>6/30/2025</a:t>
+              <a:t>7/8/2025</a:t>
             </a:fld>
             <a:endParaRPr lang="en-US"/>
           </a:p>
@@ -7403,7 +7403,7 @@
           <a:p>
             <a:fld id="{4509A250-FF31-4206-8172-F9D3106AACB1}" type="datetimeFigureOut">
               <a:rPr lang="en-US" smtClean="0"/>
-              <a:t>6/30/2025</a:t>
+              <a:t>7/8/2025</a:t>
             </a:fld>
             <a:endParaRPr lang="en-US"/>
           </a:p>
@@ -7647,7 +7647,7 @@
           <a:p>
             <a:fld id="{9796027F-7875-4030-9381-8BD8C4F21935}" type="datetimeFigureOut">
               <a:rPr lang="en-US" smtClean="0"/>
-              <a:t>6/30/2025</a:t>
+              <a:t>7/8/2025</a:t>
             </a:fld>
             <a:endParaRPr lang="en-US"/>
           </a:p>
@@ -7881,7 +7881,7 @@
           <a:p>
             <a:fld id="{9796027F-7875-4030-9381-8BD8C4F21935}" type="datetimeFigureOut">
               <a:rPr lang="en-US" smtClean="0"/>
-              <a:t>6/30/2025</a:t>
+              <a:t>7/8/2025</a:t>
             </a:fld>
             <a:endParaRPr lang="en-US"/>
           </a:p>
@@ -8345,7 +8345,7 @@
           <a:p>
             <a:fld id="{9796027F-7875-4030-9381-8BD8C4F21935}" type="datetimeFigureOut">
               <a:rPr lang="en-US" smtClean="0"/>
-              <a:t>6/30/2025</a:t>
+              <a:t>7/8/2025</a:t>
             </a:fld>
             <a:endParaRPr lang="en-US"/>
           </a:p>
@@ -8463,7 +8463,7 @@
           <a:p>
             <a:fld id="{4509A250-FF31-4206-8172-F9D3106AACB1}" type="datetimeFigureOut">
               <a:rPr lang="en-US" smtClean="0"/>
-              <a:t>6/30/2025</a:t>
+              <a:t>7/8/2025</a:t>
             </a:fld>
             <a:endParaRPr lang="en-US"/>
           </a:p>
@@ -8559,7 +8559,7 @@
           <a:p>
             <a:fld id="{4509A250-FF31-4206-8172-F9D3106AACB1}" type="datetimeFigureOut">
               <a:rPr lang="en-US" smtClean="0"/>
-              <a:t>6/30/2025</a:t>
+              <a:t>7/8/2025</a:t>
             </a:fld>
             <a:endParaRPr lang="en-US"/>
           </a:p>
@@ -8813,7 +8813,7 @@
           <a:p>
             <a:fld id="{4509A250-FF31-4206-8172-F9D3106AACB1}" type="datetimeFigureOut">
               <a:rPr lang="en-US" smtClean="0"/>
-              <a:t>6/30/2025</a:t>
+              <a:t>7/8/2025</a:t>
             </a:fld>
             <a:endParaRPr lang="en-US"/>
           </a:p>
@@ -9112,7 +9112,7 @@
           <a:p>
             <a:fld id="{4509A250-FF31-4206-8172-F9D3106AACB1}" type="datetimeFigureOut">
               <a:rPr lang="en-US" smtClean="0"/>
-              <a:t>6/30/2025</a:t>
+              <a:t>7/8/2025</a:t>
             </a:fld>
             <a:endParaRPr lang="en-US"/>
           </a:p>
@@ -9345,7 +9345,7 @@
           <a:p>
             <a:fld id="{4AAD347D-5ACD-4C99-B74B-A9C85AD731AF}" type="datetimeFigureOut">
               <a:rPr lang="en-US" smtClean="0"/>
-              <a:t>6/30/2025</a:t>
+              <a:t>7/8/2025</a:t>
             </a:fld>
             <a:endParaRPr lang="en-US"/>
           </a:p>
